--- a/Shubham Narawade.pptx
+++ b/Shubham Narawade.pptx
@@ -260,7 +260,7 @@
       <p15:sldGuideLst xmlns:p15="http://schemas.microsoft.com/office/powerpoint/2012/main"/>
     </p:ext>
     <p:ext uri="GoogleSlidesCustomDataVersion2">
-      <go:slidesCustomData xmlns:go="http://customooxmlschemas.google.com/" xmlns:ahyp="http://schemas.microsoft.com/office/drawing/2018/hyperlinkcolor" xmlns:p15="http://schemas.microsoft.com/office/powerpoint/2012/main" xmlns:p14="http://schemas.microsoft.com/office/powerpoint/2010/main" xmlns:com="http://schemas.openxmlformats.org/drawingml/2006/compatibility" xmlns:pvml="urn:schemas-microsoft-com:office:powerpoint" xmlns:v="urn:schemas-microsoft-com:vml" xmlns:o="urn:schemas-microsoft-com:office:office" xmlns:dgm="http://schemas.openxmlformats.org/drawingml/2006/diagram" xmlns:c="http://schemas.openxmlformats.org/drawingml/2006/chart" xmlns:mv="urn:schemas-microsoft-com:mac:vml" xmlns:mc="http://schemas.openxmlformats.org/markup-compatibility/2006" xmlns="" r:id="rId27" roundtripDataSignature="AMtx7mjt3491jQ7aCoyIz2WXeHKroE7tpQ=="/>
+      <go:slidesCustomData xmlns="" xmlns:mc="http://schemas.openxmlformats.org/markup-compatibility/2006" xmlns:mv="urn:schemas-microsoft-com:mac:vml" xmlns:c="http://schemas.openxmlformats.org/drawingml/2006/chart" xmlns:dgm="http://schemas.openxmlformats.org/drawingml/2006/diagram" xmlns:o="urn:schemas-microsoft-com:office:office" xmlns:v="urn:schemas-microsoft-com:vml" xmlns:pvml="urn:schemas-microsoft-com:office:powerpoint" xmlns:com="http://schemas.openxmlformats.org/drawingml/2006/compatibility" xmlns:p14="http://schemas.microsoft.com/office/powerpoint/2010/main" xmlns:p15="http://schemas.microsoft.com/office/powerpoint/2012/main" xmlns:ahyp="http://schemas.microsoft.com/office/drawing/2018/hyperlinkcolor" xmlns:go="http://customooxmlschemas.google.com/" r:id="rId27" roundtripDataSignature="AMtx7mjt3491jQ7aCoyIz2WXeHKroE7tpQ=="/>
     </p:ext>
   </p:extLst>
 </p:presentation>
@@ -13124,8 +13124,8 @@
         </p:nvSpPr>
         <p:spPr>
           <a:xfrm>
-            <a:off x="560439" y="1153712"/>
-            <a:ext cx="11002295" cy="4277001"/>
+            <a:off x="442452" y="1153712"/>
+            <a:ext cx="11287431" cy="4277001"/>
           </a:xfrm>
           <a:prstGeom prst="rect">
             <a:avLst/>
@@ -13251,7 +13251,7 @@
                 <a:cs typeface="Times New Roman"/>
                 <a:sym typeface="Times New Roman"/>
               </a:rPr>
-              <a:t> URL – https://github.com/ShubhamShivNarawade/IBM-Project</a:t>
+              <a:t> URL – https://github.com/ShubhamShivNarawade/IBM-Project.git</a:t>
             </a:r>
           </a:p>
           <a:p>
@@ -13264,7 +13264,7 @@
               </a:buClr>
               <a:buSzPts val="1850"/>
             </a:pPr>
-            <a:endParaRPr lang="en-US" sz="1850" b="1">
+            <a:endParaRPr lang="en-US" sz="1850" b="1" dirty="0">
               <a:solidFill>
                 <a:srgbClr val="2B3541"/>
               </a:solidFill>
@@ -13285,18 +13285,6 @@
               <a:buSzPts val="1850"/>
             </a:pPr>
             <a:r>
-              <a:rPr lang="en-US" sz="1850" b="1">
-                <a:solidFill>
-                  <a:srgbClr val="2B3541"/>
-                </a:solidFill>
-                <a:latin typeface="+mn-lt"/>
-                <a:ea typeface="Times New Roman"/>
-                <a:cs typeface="Times New Roman"/>
-                <a:sym typeface="Times New Roman"/>
-              </a:rPr>
-              <a:t>Make </a:t>
-            </a:r>
-            <a:r>
               <a:rPr lang="en-US" sz="1850" b="1" dirty="0">
                 <a:solidFill>
                   <a:srgbClr val="2B3541"/>
@@ -13306,7 +13294,7 @@
                 <a:cs typeface="Times New Roman"/>
                 <a:sym typeface="Times New Roman"/>
               </a:rPr>
-              <a:t>sure you have Uploaded following three files into your </a:t>
+              <a:t>Make sure you have Uploaded following three files into your </a:t>
             </a:r>
             <a:r>
               <a:rPr lang="en-US" sz="1850" b="1" dirty="0" err="1">
@@ -13377,7 +13365,7 @@
                 <a:cs typeface="Times New Roman"/>
                 <a:sym typeface="Times New Roman"/>
               </a:rPr>
-              <a:t> file , 2) yourproblemstatement.pdf file  3) your projectpresntation.pptx file 4)any other files </a:t>
+              <a:t> file , 2) yourproblemstatement.pdf file  3) your projectpresntation.pptx file 4) any other files </a:t>
             </a:r>
           </a:p>
           <a:p>
